--- a/tools/FreeP.RenderCompare/corpus/07-customgeom.pptx
+++ b/tools/FreeP.RenderCompare/corpus/07-customgeom.pptx
@@ -129,7 +129,7 @@
           <p:cNvPr id="2" name="Title 1">
             <a:extLst>
               <a:ext uri="{FF2B5EF4-FFF2-40B4-BE49-F238E27FC236}">
-                <a16:creationId xmlns:a16="http://schemas.microsoft.com/office/drawing/2014/main" id="{C4F5BC22-E735-3C6E-E09B-171E7955B195}"/>
+                <a16:creationId xmlns:a16="http://schemas.microsoft.com/office/drawing/2014/main" id="{A37D52A9-0971-4E2B-316B-B6558C93ECBA}"/>
               </a:ext>
             </a:extLst>
           </p:cNvPr>
@@ -166,7 +166,7 @@
           <p:cNvPr id="3" name="Subtitle 2">
             <a:extLst>
               <a:ext uri="{FF2B5EF4-FFF2-40B4-BE49-F238E27FC236}">
-                <a16:creationId xmlns:a16="http://schemas.microsoft.com/office/drawing/2014/main" id="{2FB045AD-C035-F8D2-B58D-B84F603F2E34}"/>
+                <a16:creationId xmlns:a16="http://schemas.microsoft.com/office/drawing/2014/main" id="{DD731D04-6A4C-FE3E-1874-C5B3FAD37931}"/>
               </a:ext>
             </a:extLst>
           </p:cNvPr>
@@ -236,7 +236,7 @@
           <p:cNvPr id="4" name="Date Placeholder 3">
             <a:extLst>
               <a:ext uri="{FF2B5EF4-FFF2-40B4-BE49-F238E27FC236}">
-                <a16:creationId xmlns:a16="http://schemas.microsoft.com/office/drawing/2014/main" id="{811CB6EE-598D-7141-7471-90BA364E470D}"/>
+                <a16:creationId xmlns:a16="http://schemas.microsoft.com/office/drawing/2014/main" id="{712BCEE6-A88E-732F-54CB-EA57AC67ABAF}"/>
               </a:ext>
             </a:extLst>
           </p:cNvPr>
@@ -252,7 +252,7 @@
           <a:bodyPr/>
           <a:lstStyle/>
           <a:p>
-            <a:fld id="{71518110-4A3B-49AD-AD07-07F38F7CBB60}" type="datetimeFigureOut">
+            <a:fld id="{56A078A5-2014-4063-8460-52BAF75C1526}" type="datetimeFigureOut">
               <a:rPr lang="en-US" smtClean="0"/>
               <a:t>6/26/2026</a:t>
             </a:fld>
@@ -265,7 +265,7 @@
           <p:cNvPr id="5" name="Footer Placeholder 4">
             <a:extLst>
               <a:ext uri="{FF2B5EF4-FFF2-40B4-BE49-F238E27FC236}">
-                <a16:creationId xmlns:a16="http://schemas.microsoft.com/office/drawing/2014/main" id="{00E3C10D-8045-8380-DD30-11F9B835F34F}"/>
+                <a16:creationId xmlns:a16="http://schemas.microsoft.com/office/drawing/2014/main" id="{EA623FE6-38CF-EB07-D79F-B98E515B6904}"/>
               </a:ext>
             </a:extLst>
           </p:cNvPr>
@@ -290,7 +290,7 @@
           <p:cNvPr id="6" name="Slide Number Placeholder 5">
             <a:extLst>
               <a:ext uri="{FF2B5EF4-FFF2-40B4-BE49-F238E27FC236}">
-                <a16:creationId xmlns:a16="http://schemas.microsoft.com/office/drawing/2014/main" id="{DAF60B26-4E6C-35E9-CD28-835486BAF736}"/>
+                <a16:creationId xmlns:a16="http://schemas.microsoft.com/office/drawing/2014/main" id="{3F103432-1233-118D-640D-4BC03A2D77E3}"/>
               </a:ext>
             </a:extLst>
           </p:cNvPr>
@@ -306,7 +306,7 @@
           <a:bodyPr/>
           <a:lstStyle/>
           <a:p>
-            <a:fld id="{5A4D5E66-681C-463C-9044-6FD700F64034}" type="slidenum">
+            <a:fld id="{856F0DEB-0330-4E70-98E9-AA8247FA1445}" type="slidenum">
               <a:rPr lang="en-US" smtClean="0"/>
               <a:t>‹#›</a:t>
             </a:fld>
@@ -317,7 +317,7 @@
     </p:spTree>
     <p:extLst>
       <p:ext uri="{BB962C8B-B14F-4D97-AF65-F5344CB8AC3E}">
-        <p14:creationId xmlns:p14="http://schemas.microsoft.com/office/powerpoint/2010/main" val="2033164208"/>
+        <p14:creationId xmlns:p14="http://schemas.microsoft.com/office/powerpoint/2010/main" val="4876390"/>
       </p:ext>
     </p:extLst>
   </p:cSld>
@@ -349,7 +349,7 @@
           <p:cNvPr id="2" name="Title 1">
             <a:extLst>
               <a:ext uri="{FF2B5EF4-FFF2-40B4-BE49-F238E27FC236}">
-                <a16:creationId xmlns:a16="http://schemas.microsoft.com/office/drawing/2014/main" id="{AE6AB2F0-8B3C-FADE-9661-845B83AAC5C7}"/>
+                <a16:creationId xmlns:a16="http://schemas.microsoft.com/office/drawing/2014/main" id="{7B3B2DD4-6B55-B623-7FE2-A7F70E8E6EF2}"/>
               </a:ext>
             </a:extLst>
           </p:cNvPr>
@@ -377,7 +377,7 @@
           <p:cNvPr id="3" name="Vertical Text Placeholder 2">
             <a:extLst>
               <a:ext uri="{FF2B5EF4-FFF2-40B4-BE49-F238E27FC236}">
-                <a16:creationId xmlns:a16="http://schemas.microsoft.com/office/drawing/2014/main" id="{0F246336-C83F-1C91-B0C3-C4AC8B54CE67}"/>
+                <a16:creationId xmlns:a16="http://schemas.microsoft.com/office/drawing/2014/main" id="{80DAB82D-8814-D7A0-A03A-B7C3D00A5E8F}"/>
               </a:ext>
             </a:extLst>
           </p:cNvPr>
@@ -434,7 +434,7 @@
           <p:cNvPr id="4" name="Date Placeholder 3">
             <a:extLst>
               <a:ext uri="{FF2B5EF4-FFF2-40B4-BE49-F238E27FC236}">
-                <a16:creationId xmlns:a16="http://schemas.microsoft.com/office/drawing/2014/main" id="{8CC2ED57-B1B3-2D80-5FCC-EBBBF3F001A4}"/>
+                <a16:creationId xmlns:a16="http://schemas.microsoft.com/office/drawing/2014/main" id="{FC070C75-361B-9AB0-44C2-FD5D07F08E02}"/>
               </a:ext>
             </a:extLst>
           </p:cNvPr>
@@ -450,7 +450,7 @@
           <a:bodyPr/>
           <a:lstStyle/>
           <a:p>
-            <a:fld id="{71518110-4A3B-49AD-AD07-07F38F7CBB60}" type="datetimeFigureOut">
+            <a:fld id="{56A078A5-2014-4063-8460-52BAF75C1526}" type="datetimeFigureOut">
               <a:rPr lang="en-US" smtClean="0"/>
               <a:t>6/26/2026</a:t>
             </a:fld>
@@ -463,7 +463,7 @@
           <p:cNvPr id="5" name="Footer Placeholder 4">
             <a:extLst>
               <a:ext uri="{FF2B5EF4-FFF2-40B4-BE49-F238E27FC236}">
-                <a16:creationId xmlns:a16="http://schemas.microsoft.com/office/drawing/2014/main" id="{A46EEF58-1FED-E45B-2E84-D88CBDFCE838}"/>
+                <a16:creationId xmlns:a16="http://schemas.microsoft.com/office/drawing/2014/main" id="{2CBB29EB-84C8-DA94-064B-D6F04B4691D3}"/>
               </a:ext>
             </a:extLst>
           </p:cNvPr>
@@ -488,7 +488,7 @@
           <p:cNvPr id="6" name="Slide Number Placeholder 5">
             <a:extLst>
               <a:ext uri="{FF2B5EF4-FFF2-40B4-BE49-F238E27FC236}">
-                <a16:creationId xmlns:a16="http://schemas.microsoft.com/office/drawing/2014/main" id="{E95C0366-A1B6-C26B-A80D-3705B0C75BEC}"/>
+                <a16:creationId xmlns:a16="http://schemas.microsoft.com/office/drawing/2014/main" id="{45323A29-4FD5-1C29-02FA-D98221073433}"/>
               </a:ext>
             </a:extLst>
           </p:cNvPr>
@@ -504,7 +504,7 @@
           <a:bodyPr/>
           <a:lstStyle/>
           <a:p>
-            <a:fld id="{5A4D5E66-681C-463C-9044-6FD700F64034}" type="slidenum">
+            <a:fld id="{856F0DEB-0330-4E70-98E9-AA8247FA1445}" type="slidenum">
               <a:rPr lang="en-US" smtClean="0"/>
               <a:t>‹#›</a:t>
             </a:fld>
@@ -515,7 +515,7 @@
     </p:spTree>
     <p:extLst>
       <p:ext uri="{BB962C8B-B14F-4D97-AF65-F5344CB8AC3E}">
-        <p14:creationId xmlns:p14="http://schemas.microsoft.com/office/powerpoint/2010/main" val="2175082898"/>
+        <p14:creationId xmlns:p14="http://schemas.microsoft.com/office/powerpoint/2010/main" val="2959485496"/>
       </p:ext>
     </p:extLst>
   </p:cSld>
@@ -547,7 +547,7 @@
           <p:cNvPr id="2" name="Vertical Title 1">
             <a:extLst>
               <a:ext uri="{FF2B5EF4-FFF2-40B4-BE49-F238E27FC236}">
-                <a16:creationId xmlns:a16="http://schemas.microsoft.com/office/drawing/2014/main" id="{7AA09A6D-6C29-C1B5-2C43-5E776DB529B4}"/>
+                <a16:creationId xmlns:a16="http://schemas.microsoft.com/office/drawing/2014/main" id="{5144EFB8-1972-14BF-B641-7DA675411EC7}"/>
               </a:ext>
             </a:extLst>
           </p:cNvPr>
@@ -580,7 +580,7 @@
           <p:cNvPr id="3" name="Vertical Text Placeholder 2">
             <a:extLst>
               <a:ext uri="{FF2B5EF4-FFF2-40B4-BE49-F238E27FC236}">
-                <a16:creationId xmlns:a16="http://schemas.microsoft.com/office/drawing/2014/main" id="{A1103352-181C-2013-4513-FE36849CD94D}"/>
+                <a16:creationId xmlns:a16="http://schemas.microsoft.com/office/drawing/2014/main" id="{347D779E-35B9-D42A-3B5C-26E3422101E2}"/>
               </a:ext>
             </a:extLst>
           </p:cNvPr>
@@ -642,7 +642,7 @@
           <p:cNvPr id="4" name="Date Placeholder 3">
             <a:extLst>
               <a:ext uri="{FF2B5EF4-FFF2-40B4-BE49-F238E27FC236}">
-                <a16:creationId xmlns:a16="http://schemas.microsoft.com/office/drawing/2014/main" id="{C299518A-C745-8725-9DC7-17B7156ECDF3}"/>
+                <a16:creationId xmlns:a16="http://schemas.microsoft.com/office/drawing/2014/main" id="{9BA55245-CED0-40F2-0DDF-C9F73B01B2E6}"/>
               </a:ext>
             </a:extLst>
           </p:cNvPr>
@@ -658,7 +658,7 @@
           <a:bodyPr/>
           <a:lstStyle/>
           <a:p>
-            <a:fld id="{71518110-4A3B-49AD-AD07-07F38F7CBB60}" type="datetimeFigureOut">
+            <a:fld id="{56A078A5-2014-4063-8460-52BAF75C1526}" type="datetimeFigureOut">
               <a:rPr lang="en-US" smtClean="0"/>
               <a:t>6/26/2026</a:t>
             </a:fld>
@@ -671,7 +671,7 @@
           <p:cNvPr id="5" name="Footer Placeholder 4">
             <a:extLst>
               <a:ext uri="{FF2B5EF4-FFF2-40B4-BE49-F238E27FC236}">
-                <a16:creationId xmlns:a16="http://schemas.microsoft.com/office/drawing/2014/main" id="{963BF159-BAEB-451D-30CC-2B1C98AF27C4}"/>
+                <a16:creationId xmlns:a16="http://schemas.microsoft.com/office/drawing/2014/main" id="{987654FB-124F-537C-6BE7-5A894AB651B0}"/>
               </a:ext>
             </a:extLst>
           </p:cNvPr>
@@ -696,7 +696,7 @@
           <p:cNvPr id="6" name="Slide Number Placeholder 5">
             <a:extLst>
               <a:ext uri="{FF2B5EF4-FFF2-40B4-BE49-F238E27FC236}">
-                <a16:creationId xmlns:a16="http://schemas.microsoft.com/office/drawing/2014/main" id="{D39ED5CC-071C-7263-B30A-45CC93DACBB2}"/>
+                <a16:creationId xmlns:a16="http://schemas.microsoft.com/office/drawing/2014/main" id="{89ADAC9B-5A17-8827-0395-FECD630279E4}"/>
               </a:ext>
             </a:extLst>
           </p:cNvPr>
@@ -712,7 +712,7 @@
           <a:bodyPr/>
           <a:lstStyle/>
           <a:p>
-            <a:fld id="{5A4D5E66-681C-463C-9044-6FD700F64034}" type="slidenum">
+            <a:fld id="{856F0DEB-0330-4E70-98E9-AA8247FA1445}" type="slidenum">
               <a:rPr lang="en-US" smtClean="0"/>
               <a:t>‹#›</a:t>
             </a:fld>
@@ -723,7 +723,7 @@
     </p:spTree>
     <p:extLst>
       <p:ext uri="{BB962C8B-B14F-4D97-AF65-F5344CB8AC3E}">
-        <p14:creationId xmlns:p14="http://schemas.microsoft.com/office/powerpoint/2010/main" val="2265426432"/>
+        <p14:creationId xmlns:p14="http://schemas.microsoft.com/office/powerpoint/2010/main" val="748450547"/>
       </p:ext>
     </p:extLst>
   </p:cSld>
@@ -755,7 +755,7 @@
           <p:cNvPr id="2" name="Title 1">
             <a:extLst>
               <a:ext uri="{FF2B5EF4-FFF2-40B4-BE49-F238E27FC236}">
-                <a16:creationId xmlns:a16="http://schemas.microsoft.com/office/drawing/2014/main" id="{C5E389E5-683A-8B26-E0B1-774048544018}"/>
+                <a16:creationId xmlns:a16="http://schemas.microsoft.com/office/drawing/2014/main" id="{B7930428-6718-C1A7-0CA2-96AC10BE54AE}"/>
               </a:ext>
             </a:extLst>
           </p:cNvPr>
@@ -783,7 +783,7 @@
           <p:cNvPr id="3" name="Content Placeholder 2">
             <a:extLst>
               <a:ext uri="{FF2B5EF4-FFF2-40B4-BE49-F238E27FC236}">
-                <a16:creationId xmlns:a16="http://schemas.microsoft.com/office/drawing/2014/main" id="{DCE26F25-0A0B-E19C-3E00-E63F5AFA2AD7}"/>
+                <a16:creationId xmlns:a16="http://schemas.microsoft.com/office/drawing/2014/main" id="{F48A339A-EB8D-303B-6F84-D1D3EDF303B9}"/>
               </a:ext>
             </a:extLst>
           </p:cNvPr>
@@ -840,7 +840,7 @@
           <p:cNvPr id="4" name="Date Placeholder 3">
             <a:extLst>
               <a:ext uri="{FF2B5EF4-FFF2-40B4-BE49-F238E27FC236}">
-                <a16:creationId xmlns:a16="http://schemas.microsoft.com/office/drawing/2014/main" id="{03062978-E68E-3895-B78E-DD3709110C0D}"/>
+                <a16:creationId xmlns:a16="http://schemas.microsoft.com/office/drawing/2014/main" id="{93EE7B9D-13B4-B535-B72E-1DD56623A561}"/>
               </a:ext>
             </a:extLst>
           </p:cNvPr>
@@ -856,7 +856,7 @@
           <a:bodyPr/>
           <a:lstStyle/>
           <a:p>
-            <a:fld id="{71518110-4A3B-49AD-AD07-07F38F7CBB60}" type="datetimeFigureOut">
+            <a:fld id="{56A078A5-2014-4063-8460-52BAF75C1526}" type="datetimeFigureOut">
               <a:rPr lang="en-US" smtClean="0"/>
               <a:t>6/26/2026</a:t>
             </a:fld>
@@ -869,7 +869,7 @@
           <p:cNvPr id="5" name="Footer Placeholder 4">
             <a:extLst>
               <a:ext uri="{FF2B5EF4-FFF2-40B4-BE49-F238E27FC236}">
-                <a16:creationId xmlns:a16="http://schemas.microsoft.com/office/drawing/2014/main" id="{8A3E8A21-AFC5-BF8C-1032-4A9D65B95397}"/>
+                <a16:creationId xmlns:a16="http://schemas.microsoft.com/office/drawing/2014/main" id="{B3B49735-5479-3F12-7867-2107C4C5890E}"/>
               </a:ext>
             </a:extLst>
           </p:cNvPr>
@@ -894,7 +894,7 @@
           <p:cNvPr id="6" name="Slide Number Placeholder 5">
             <a:extLst>
               <a:ext uri="{FF2B5EF4-FFF2-40B4-BE49-F238E27FC236}">
-                <a16:creationId xmlns:a16="http://schemas.microsoft.com/office/drawing/2014/main" id="{50039EFA-9F58-977B-EDDF-1D4C6E1A6702}"/>
+                <a16:creationId xmlns:a16="http://schemas.microsoft.com/office/drawing/2014/main" id="{ABA442D3-4418-3249-DFA3-3FCF9D4B0174}"/>
               </a:ext>
             </a:extLst>
           </p:cNvPr>
@@ -910,7 +910,7 @@
           <a:bodyPr/>
           <a:lstStyle/>
           <a:p>
-            <a:fld id="{5A4D5E66-681C-463C-9044-6FD700F64034}" type="slidenum">
+            <a:fld id="{856F0DEB-0330-4E70-98E9-AA8247FA1445}" type="slidenum">
               <a:rPr lang="en-US" smtClean="0"/>
               <a:t>‹#›</a:t>
             </a:fld>
@@ -921,7 +921,7 @@
     </p:spTree>
     <p:extLst>
       <p:ext uri="{BB962C8B-B14F-4D97-AF65-F5344CB8AC3E}">
-        <p14:creationId xmlns:p14="http://schemas.microsoft.com/office/powerpoint/2010/main" val="2330987259"/>
+        <p14:creationId xmlns:p14="http://schemas.microsoft.com/office/powerpoint/2010/main" val="1626320560"/>
       </p:ext>
     </p:extLst>
   </p:cSld>
@@ -953,7 +953,7 @@
           <p:cNvPr id="2" name="Title 1">
             <a:extLst>
               <a:ext uri="{FF2B5EF4-FFF2-40B4-BE49-F238E27FC236}">
-                <a16:creationId xmlns:a16="http://schemas.microsoft.com/office/drawing/2014/main" id="{70C6198A-1F65-4D5D-7324-766F695B27BE}"/>
+                <a16:creationId xmlns:a16="http://schemas.microsoft.com/office/drawing/2014/main" id="{02E566BC-F4B7-BA1C-4126-77461BAF4830}"/>
               </a:ext>
             </a:extLst>
           </p:cNvPr>
@@ -990,7 +990,7 @@
           <p:cNvPr id="3" name="Text Placeholder 2">
             <a:extLst>
               <a:ext uri="{FF2B5EF4-FFF2-40B4-BE49-F238E27FC236}">
-                <a16:creationId xmlns:a16="http://schemas.microsoft.com/office/drawing/2014/main" id="{D47BA7A7-5C35-21D2-093F-EC8CAAC0DEF0}"/>
+                <a16:creationId xmlns:a16="http://schemas.microsoft.com/office/drawing/2014/main" id="{DCD1919C-85C6-9779-0865-6D4104FA559E}"/>
               </a:ext>
             </a:extLst>
           </p:cNvPr>
@@ -1115,7 +1115,7 @@
           <p:cNvPr id="4" name="Date Placeholder 3">
             <a:extLst>
               <a:ext uri="{FF2B5EF4-FFF2-40B4-BE49-F238E27FC236}">
-                <a16:creationId xmlns:a16="http://schemas.microsoft.com/office/drawing/2014/main" id="{E7B12569-6559-2B52-67D3-3DE29CF97EAD}"/>
+                <a16:creationId xmlns:a16="http://schemas.microsoft.com/office/drawing/2014/main" id="{E8C341D2-410D-C4C9-9B67-FCB2E0F4455D}"/>
               </a:ext>
             </a:extLst>
           </p:cNvPr>
@@ -1131,7 +1131,7 @@
           <a:bodyPr/>
           <a:lstStyle/>
           <a:p>
-            <a:fld id="{71518110-4A3B-49AD-AD07-07F38F7CBB60}" type="datetimeFigureOut">
+            <a:fld id="{56A078A5-2014-4063-8460-52BAF75C1526}" type="datetimeFigureOut">
               <a:rPr lang="en-US" smtClean="0"/>
               <a:t>6/26/2026</a:t>
             </a:fld>
@@ -1144,7 +1144,7 @@
           <p:cNvPr id="5" name="Footer Placeholder 4">
             <a:extLst>
               <a:ext uri="{FF2B5EF4-FFF2-40B4-BE49-F238E27FC236}">
-                <a16:creationId xmlns:a16="http://schemas.microsoft.com/office/drawing/2014/main" id="{92B9DE55-9D10-C417-DF71-59154CDE5A5A}"/>
+                <a16:creationId xmlns:a16="http://schemas.microsoft.com/office/drawing/2014/main" id="{B7EB6FD6-3572-0178-AF1C-3B96A3187F73}"/>
               </a:ext>
             </a:extLst>
           </p:cNvPr>
@@ -1169,7 +1169,7 @@
           <p:cNvPr id="6" name="Slide Number Placeholder 5">
             <a:extLst>
               <a:ext uri="{FF2B5EF4-FFF2-40B4-BE49-F238E27FC236}">
-                <a16:creationId xmlns:a16="http://schemas.microsoft.com/office/drawing/2014/main" id="{DC10BFB4-A307-5EE1-A19C-7ACA334445A5}"/>
+                <a16:creationId xmlns:a16="http://schemas.microsoft.com/office/drawing/2014/main" id="{3EB5829A-3E79-7406-A381-59ADC16BE19E}"/>
               </a:ext>
             </a:extLst>
           </p:cNvPr>
@@ -1185,7 +1185,7 @@
           <a:bodyPr/>
           <a:lstStyle/>
           <a:p>
-            <a:fld id="{5A4D5E66-681C-463C-9044-6FD700F64034}" type="slidenum">
+            <a:fld id="{856F0DEB-0330-4E70-98E9-AA8247FA1445}" type="slidenum">
               <a:rPr lang="en-US" smtClean="0"/>
               <a:t>‹#›</a:t>
             </a:fld>
@@ -1196,7 +1196,7 @@
     </p:spTree>
     <p:extLst>
       <p:ext uri="{BB962C8B-B14F-4D97-AF65-F5344CB8AC3E}">
-        <p14:creationId xmlns:p14="http://schemas.microsoft.com/office/powerpoint/2010/main" val="692815394"/>
+        <p14:creationId xmlns:p14="http://schemas.microsoft.com/office/powerpoint/2010/main" val="2562535611"/>
       </p:ext>
     </p:extLst>
   </p:cSld>
@@ -1228,7 +1228,7 @@
           <p:cNvPr id="2" name="Title 1">
             <a:extLst>
               <a:ext uri="{FF2B5EF4-FFF2-40B4-BE49-F238E27FC236}">
-                <a16:creationId xmlns:a16="http://schemas.microsoft.com/office/drawing/2014/main" id="{5F7057A0-5586-B4FC-0D44-52F8DEAD62A6}"/>
+                <a16:creationId xmlns:a16="http://schemas.microsoft.com/office/drawing/2014/main" id="{F5BFD32D-30E7-7965-8B8B-E083CE93752D}"/>
               </a:ext>
             </a:extLst>
           </p:cNvPr>
@@ -1256,7 +1256,7 @@
           <p:cNvPr id="3" name="Content Placeholder 2">
             <a:extLst>
               <a:ext uri="{FF2B5EF4-FFF2-40B4-BE49-F238E27FC236}">
-                <a16:creationId xmlns:a16="http://schemas.microsoft.com/office/drawing/2014/main" id="{3272DCD4-1177-13C4-ECA5-95CAE8AFA728}"/>
+                <a16:creationId xmlns:a16="http://schemas.microsoft.com/office/drawing/2014/main" id="{3611A31C-BCA0-EC16-BD5D-C698C3C4C23B}"/>
               </a:ext>
             </a:extLst>
           </p:cNvPr>
@@ -1318,7 +1318,7 @@
           <p:cNvPr id="4" name="Content Placeholder 3">
             <a:extLst>
               <a:ext uri="{FF2B5EF4-FFF2-40B4-BE49-F238E27FC236}">
-                <a16:creationId xmlns:a16="http://schemas.microsoft.com/office/drawing/2014/main" id="{8BD7A99A-9F79-39CA-35F6-72B8636F7E67}"/>
+                <a16:creationId xmlns:a16="http://schemas.microsoft.com/office/drawing/2014/main" id="{F0EC7D20-9B84-770A-D8D1-021804493467}"/>
               </a:ext>
             </a:extLst>
           </p:cNvPr>
@@ -1380,7 +1380,7 @@
           <p:cNvPr id="5" name="Date Placeholder 4">
             <a:extLst>
               <a:ext uri="{FF2B5EF4-FFF2-40B4-BE49-F238E27FC236}">
-                <a16:creationId xmlns:a16="http://schemas.microsoft.com/office/drawing/2014/main" id="{2F641FCD-21AA-3D19-BC3A-7BCAB3A557FF}"/>
+                <a16:creationId xmlns:a16="http://schemas.microsoft.com/office/drawing/2014/main" id="{55B3CCF5-C4D6-B024-15F9-00F57B0538FF}"/>
               </a:ext>
             </a:extLst>
           </p:cNvPr>
@@ -1396,7 +1396,7 @@
           <a:bodyPr/>
           <a:lstStyle/>
           <a:p>
-            <a:fld id="{71518110-4A3B-49AD-AD07-07F38F7CBB60}" type="datetimeFigureOut">
+            <a:fld id="{56A078A5-2014-4063-8460-52BAF75C1526}" type="datetimeFigureOut">
               <a:rPr lang="en-US" smtClean="0"/>
               <a:t>6/26/2026</a:t>
             </a:fld>
@@ -1409,7 +1409,7 @@
           <p:cNvPr id="6" name="Footer Placeholder 5">
             <a:extLst>
               <a:ext uri="{FF2B5EF4-FFF2-40B4-BE49-F238E27FC236}">
-                <a16:creationId xmlns:a16="http://schemas.microsoft.com/office/drawing/2014/main" id="{E65CA4F3-8258-AF87-5851-F54A208C7A68}"/>
+                <a16:creationId xmlns:a16="http://schemas.microsoft.com/office/drawing/2014/main" id="{ADC6177A-F220-833B-4FD4-78657EE42809}"/>
               </a:ext>
             </a:extLst>
           </p:cNvPr>
@@ -1434,7 +1434,7 @@
           <p:cNvPr id="7" name="Slide Number Placeholder 6">
             <a:extLst>
               <a:ext uri="{FF2B5EF4-FFF2-40B4-BE49-F238E27FC236}">
-                <a16:creationId xmlns:a16="http://schemas.microsoft.com/office/drawing/2014/main" id="{AA43D4EC-2D16-9B3C-3E08-6E30886779F5}"/>
+                <a16:creationId xmlns:a16="http://schemas.microsoft.com/office/drawing/2014/main" id="{854DD3E2-1904-2473-3E35-A0565868E14B}"/>
               </a:ext>
             </a:extLst>
           </p:cNvPr>
@@ -1450,7 +1450,7 @@
           <a:bodyPr/>
           <a:lstStyle/>
           <a:p>
-            <a:fld id="{5A4D5E66-681C-463C-9044-6FD700F64034}" type="slidenum">
+            <a:fld id="{856F0DEB-0330-4E70-98E9-AA8247FA1445}" type="slidenum">
               <a:rPr lang="en-US" smtClean="0"/>
               <a:t>‹#›</a:t>
             </a:fld>
@@ -1461,7 +1461,7 @@
     </p:spTree>
     <p:extLst>
       <p:ext uri="{BB962C8B-B14F-4D97-AF65-F5344CB8AC3E}">
-        <p14:creationId xmlns:p14="http://schemas.microsoft.com/office/powerpoint/2010/main" val="2398483037"/>
+        <p14:creationId xmlns:p14="http://schemas.microsoft.com/office/powerpoint/2010/main" val="2053647364"/>
       </p:ext>
     </p:extLst>
   </p:cSld>
@@ -1493,7 +1493,7 @@
           <p:cNvPr id="2" name="Title 1">
             <a:extLst>
               <a:ext uri="{FF2B5EF4-FFF2-40B4-BE49-F238E27FC236}">
-                <a16:creationId xmlns:a16="http://schemas.microsoft.com/office/drawing/2014/main" id="{16CCBA1C-A0CA-71F2-DF98-7610D58CB434}"/>
+                <a16:creationId xmlns:a16="http://schemas.microsoft.com/office/drawing/2014/main" id="{841EA7F9-3C1B-E30E-B3CE-6C1EBC67E82F}"/>
               </a:ext>
             </a:extLst>
           </p:cNvPr>
@@ -1526,7 +1526,7 @@
           <p:cNvPr id="3" name="Text Placeholder 2">
             <a:extLst>
               <a:ext uri="{FF2B5EF4-FFF2-40B4-BE49-F238E27FC236}">
-                <a16:creationId xmlns:a16="http://schemas.microsoft.com/office/drawing/2014/main" id="{DC535F56-DB3F-A4BC-F843-F6C2FF9B943F}"/>
+                <a16:creationId xmlns:a16="http://schemas.microsoft.com/office/drawing/2014/main" id="{D7C740CE-8320-5167-6ED5-33FA3FCD6FB7}"/>
               </a:ext>
             </a:extLst>
           </p:cNvPr>
@@ -1597,7 +1597,7 @@
           <p:cNvPr id="4" name="Content Placeholder 3">
             <a:extLst>
               <a:ext uri="{FF2B5EF4-FFF2-40B4-BE49-F238E27FC236}">
-                <a16:creationId xmlns:a16="http://schemas.microsoft.com/office/drawing/2014/main" id="{BA7091A8-FC38-E96A-A103-E65DEC3A7793}"/>
+                <a16:creationId xmlns:a16="http://schemas.microsoft.com/office/drawing/2014/main" id="{CF7F242B-AD0D-A9A3-A59D-2C8FDFA5043D}"/>
               </a:ext>
             </a:extLst>
           </p:cNvPr>
@@ -1659,7 +1659,7 @@
           <p:cNvPr id="5" name="Text Placeholder 4">
             <a:extLst>
               <a:ext uri="{FF2B5EF4-FFF2-40B4-BE49-F238E27FC236}">
-                <a16:creationId xmlns:a16="http://schemas.microsoft.com/office/drawing/2014/main" id="{12126851-6FFC-C5EB-7B55-28981497C1BB}"/>
+                <a16:creationId xmlns:a16="http://schemas.microsoft.com/office/drawing/2014/main" id="{DA5A05EA-1E34-610C-D3D6-637888BA03C8}"/>
               </a:ext>
             </a:extLst>
           </p:cNvPr>
@@ -1730,7 +1730,7 @@
           <p:cNvPr id="6" name="Content Placeholder 5">
             <a:extLst>
               <a:ext uri="{FF2B5EF4-FFF2-40B4-BE49-F238E27FC236}">
-                <a16:creationId xmlns:a16="http://schemas.microsoft.com/office/drawing/2014/main" id="{EC64DE59-C04F-8C4C-4CAB-259826BEB542}"/>
+                <a16:creationId xmlns:a16="http://schemas.microsoft.com/office/drawing/2014/main" id="{DA573803-37C0-153B-2A3E-1A22D533087F}"/>
               </a:ext>
             </a:extLst>
           </p:cNvPr>
@@ -1792,7 +1792,7 @@
           <p:cNvPr id="7" name="Date Placeholder 6">
             <a:extLst>
               <a:ext uri="{FF2B5EF4-FFF2-40B4-BE49-F238E27FC236}">
-                <a16:creationId xmlns:a16="http://schemas.microsoft.com/office/drawing/2014/main" id="{D23CD703-6B51-0F2B-F614-AEBD14BB0909}"/>
+                <a16:creationId xmlns:a16="http://schemas.microsoft.com/office/drawing/2014/main" id="{C5077670-B114-0D9D-5BC7-11C42EFBD159}"/>
               </a:ext>
             </a:extLst>
           </p:cNvPr>
@@ -1808,7 +1808,7 @@
           <a:bodyPr/>
           <a:lstStyle/>
           <a:p>
-            <a:fld id="{71518110-4A3B-49AD-AD07-07F38F7CBB60}" type="datetimeFigureOut">
+            <a:fld id="{56A078A5-2014-4063-8460-52BAF75C1526}" type="datetimeFigureOut">
               <a:rPr lang="en-US" smtClean="0"/>
               <a:t>6/26/2026</a:t>
             </a:fld>
@@ -1821,7 +1821,7 @@
           <p:cNvPr id="8" name="Footer Placeholder 7">
             <a:extLst>
               <a:ext uri="{FF2B5EF4-FFF2-40B4-BE49-F238E27FC236}">
-                <a16:creationId xmlns:a16="http://schemas.microsoft.com/office/drawing/2014/main" id="{BAAF2703-3FBD-13CB-9FE5-E44539ADF2BD}"/>
+                <a16:creationId xmlns:a16="http://schemas.microsoft.com/office/drawing/2014/main" id="{4BF76513-5F32-F8A8-318E-0DBE91AEC5ED}"/>
               </a:ext>
             </a:extLst>
           </p:cNvPr>
@@ -1846,7 +1846,7 @@
           <p:cNvPr id="9" name="Slide Number Placeholder 8">
             <a:extLst>
               <a:ext uri="{FF2B5EF4-FFF2-40B4-BE49-F238E27FC236}">
-                <a16:creationId xmlns:a16="http://schemas.microsoft.com/office/drawing/2014/main" id="{E8D32B33-0803-68D7-7C6B-D6387B09FF76}"/>
+                <a16:creationId xmlns:a16="http://schemas.microsoft.com/office/drawing/2014/main" id="{CFAA7593-89BE-713F-468F-E62E7B5E7D8D}"/>
               </a:ext>
             </a:extLst>
           </p:cNvPr>
@@ -1862,7 +1862,7 @@
           <a:bodyPr/>
           <a:lstStyle/>
           <a:p>
-            <a:fld id="{5A4D5E66-681C-463C-9044-6FD700F64034}" type="slidenum">
+            <a:fld id="{856F0DEB-0330-4E70-98E9-AA8247FA1445}" type="slidenum">
               <a:rPr lang="en-US" smtClean="0"/>
               <a:t>‹#›</a:t>
             </a:fld>
@@ -1873,7 +1873,7 @@
     </p:spTree>
     <p:extLst>
       <p:ext uri="{BB962C8B-B14F-4D97-AF65-F5344CB8AC3E}">
-        <p14:creationId xmlns:p14="http://schemas.microsoft.com/office/powerpoint/2010/main" val="1845850879"/>
+        <p14:creationId xmlns:p14="http://schemas.microsoft.com/office/powerpoint/2010/main" val="4139215858"/>
       </p:ext>
     </p:extLst>
   </p:cSld>
@@ -1905,7 +1905,7 @@
           <p:cNvPr id="2" name="Title 1">
             <a:extLst>
               <a:ext uri="{FF2B5EF4-FFF2-40B4-BE49-F238E27FC236}">
-                <a16:creationId xmlns:a16="http://schemas.microsoft.com/office/drawing/2014/main" id="{9EE35796-EE3F-6A0E-DC7B-371EAAC75137}"/>
+                <a16:creationId xmlns:a16="http://schemas.microsoft.com/office/drawing/2014/main" id="{A094D2E8-90E0-549B-3D8B-186A3B5FD4A3}"/>
               </a:ext>
             </a:extLst>
           </p:cNvPr>
@@ -1933,7 +1933,7 @@
           <p:cNvPr id="3" name="Date Placeholder 2">
             <a:extLst>
               <a:ext uri="{FF2B5EF4-FFF2-40B4-BE49-F238E27FC236}">
-                <a16:creationId xmlns:a16="http://schemas.microsoft.com/office/drawing/2014/main" id="{57E9BF33-2CFC-584F-3BD3-21036212A498}"/>
+                <a16:creationId xmlns:a16="http://schemas.microsoft.com/office/drawing/2014/main" id="{D418CA0C-B2C8-2A65-008B-798440046E61}"/>
               </a:ext>
             </a:extLst>
           </p:cNvPr>
@@ -1949,7 +1949,7 @@
           <a:bodyPr/>
           <a:lstStyle/>
           <a:p>
-            <a:fld id="{71518110-4A3B-49AD-AD07-07F38F7CBB60}" type="datetimeFigureOut">
+            <a:fld id="{56A078A5-2014-4063-8460-52BAF75C1526}" type="datetimeFigureOut">
               <a:rPr lang="en-US" smtClean="0"/>
               <a:t>6/26/2026</a:t>
             </a:fld>
@@ -1962,7 +1962,7 @@
           <p:cNvPr id="4" name="Footer Placeholder 3">
             <a:extLst>
               <a:ext uri="{FF2B5EF4-FFF2-40B4-BE49-F238E27FC236}">
-                <a16:creationId xmlns:a16="http://schemas.microsoft.com/office/drawing/2014/main" id="{C84A57F7-A3EA-1D74-30FA-6E02993C5048}"/>
+                <a16:creationId xmlns:a16="http://schemas.microsoft.com/office/drawing/2014/main" id="{6A9CBEB1-E8ED-B092-9D38-779C32F8F093}"/>
               </a:ext>
             </a:extLst>
           </p:cNvPr>
@@ -1987,7 +1987,7 @@
           <p:cNvPr id="5" name="Slide Number Placeholder 4">
             <a:extLst>
               <a:ext uri="{FF2B5EF4-FFF2-40B4-BE49-F238E27FC236}">
-                <a16:creationId xmlns:a16="http://schemas.microsoft.com/office/drawing/2014/main" id="{2CEB475E-09C6-3257-E490-60E4D8F3909B}"/>
+                <a16:creationId xmlns:a16="http://schemas.microsoft.com/office/drawing/2014/main" id="{596B39D1-4462-B1BE-86A1-F046FE4961BC}"/>
               </a:ext>
             </a:extLst>
           </p:cNvPr>
@@ -2003,7 +2003,7 @@
           <a:bodyPr/>
           <a:lstStyle/>
           <a:p>
-            <a:fld id="{5A4D5E66-681C-463C-9044-6FD700F64034}" type="slidenum">
+            <a:fld id="{856F0DEB-0330-4E70-98E9-AA8247FA1445}" type="slidenum">
               <a:rPr lang="en-US" smtClean="0"/>
               <a:t>‹#›</a:t>
             </a:fld>
@@ -2014,7 +2014,7 @@
     </p:spTree>
     <p:extLst>
       <p:ext uri="{BB962C8B-B14F-4D97-AF65-F5344CB8AC3E}">
-        <p14:creationId xmlns:p14="http://schemas.microsoft.com/office/powerpoint/2010/main" val="3174767102"/>
+        <p14:creationId xmlns:p14="http://schemas.microsoft.com/office/powerpoint/2010/main" val="1893809196"/>
       </p:ext>
     </p:extLst>
   </p:cSld>
@@ -2046,7 +2046,7 @@
           <p:cNvPr id="2" name="Date Placeholder 1">
             <a:extLst>
               <a:ext uri="{FF2B5EF4-FFF2-40B4-BE49-F238E27FC236}">
-                <a16:creationId xmlns:a16="http://schemas.microsoft.com/office/drawing/2014/main" id="{A89AD181-716B-27F9-CAA7-BBF6F1A72874}"/>
+                <a16:creationId xmlns:a16="http://schemas.microsoft.com/office/drawing/2014/main" id="{1B91BCDC-71A1-9050-DB1E-6C6618AABB8B}"/>
               </a:ext>
             </a:extLst>
           </p:cNvPr>
@@ -2062,7 +2062,7 @@
           <a:bodyPr/>
           <a:lstStyle/>
           <a:p>
-            <a:fld id="{71518110-4A3B-49AD-AD07-07F38F7CBB60}" type="datetimeFigureOut">
+            <a:fld id="{56A078A5-2014-4063-8460-52BAF75C1526}" type="datetimeFigureOut">
               <a:rPr lang="en-US" smtClean="0"/>
               <a:t>6/26/2026</a:t>
             </a:fld>
@@ -2075,7 +2075,7 @@
           <p:cNvPr id="3" name="Footer Placeholder 2">
             <a:extLst>
               <a:ext uri="{FF2B5EF4-FFF2-40B4-BE49-F238E27FC236}">
-                <a16:creationId xmlns:a16="http://schemas.microsoft.com/office/drawing/2014/main" id="{7928B79E-EE77-8CE4-7D18-9CE3B0D8A2FA}"/>
+                <a16:creationId xmlns:a16="http://schemas.microsoft.com/office/drawing/2014/main" id="{A3C9A128-7ED7-D639-FA6F-12CBC9FC8AC0}"/>
               </a:ext>
             </a:extLst>
           </p:cNvPr>
@@ -2100,7 +2100,7 @@
           <p:cNvPr id="4" name="Slide Number Placeholder 3">
             <a:extLst>
               <a:ext uri="{FF2B5EF4-FFF2-40B4-BE49-F238E27FC236}">
-                <a16:creationId xmlns:a16="http://schemas.microsoft.com/office/drawing/2014/main" id="{74ED1637-1545-CA93-7ACB-A0258F8E86C6}"/>
+                <a16:creationId xmlns:a16="http://schemas.microsoft.com/office/drawing/2014/main" id="{09C9C7CC-C222-DE90-22F6-0D501E4311EB}"/>
               </a:ext>
             </a:extLst>
           </p:cNvPr>
@@ -2116,7 +2116,7 @@
           <a:bodyPr/>
           <a:lstStyle/>
           <a:p>
-            <a:fld id="{5A4D5E66-681C-463C-9044-6FD700F64034}" type="slidenum">
+            <a:fld id="{856F0DEB-0330-4E70-98E9-AA8247FA1445}" type="slidenum">
               <a:rPr lang="en-US" smtClean="0"/>
               <a:t>‹#›</a:t>
             </a:fld>
@@ -2127,7 +2127,7 @@
     </p:spTree>
     <p:extLst>
       <p:ext uri="{BB962C8B-B14F-4D97-AF65-F5344CB8AC3E}">
-        <p14:creationId xmlns:p14="http://schemas.microsoft.com/office/powerpoint/2010/main" val="1969154475"/>
+        <p14:creationId xmlns:p14="http://schemas.microsoft.com/office/powerpoint/2010/main" val="2024497053"/>
       </p:ext>
     </p:extLst>
   </p:cSld>
@@ -2159,7 +2159,7 @@
           <p:cNvPr id="2" name="Title 1">
             <a:extLst>
               <a:ext uri="{FF2B5EF4-FFF2-40B4-BE49-F238E27FC236}">
-                <a16:creationId xmlns:a16="http://schemas.microsoft.com/office/drawing/2014/main" id="{2F412942-2203-0C5B-3F1E-87C25C35FB22}"/>
+                <a16:creationId xmlns:a16="http://schemas.microsoft.com/office/drawing/2014/main" id="{045DFB76-A7DB-9987-F5FD-34EC47EA04FE}"/>
               </a:ext>
             </a:extLst>
           </p:cNvPr>
@@ -2196,7 +2196,7 @@
           <p:cNvPr id="3" name="Content Placeholder 2">
             <a:extLst>
               <a:ext uri="{FF2B5EF4-FFF2-40B4-BE49-F238E27FC236}">
-                <a16:creationId xmlns:a16="http://schemas.microsoft.com/office/drawing/2014/main" id="{AA0E5146-2FBF-D142-9364-EF09F3AA56A0}"/>
+                <a16:creationId xmlns:a16="http://schemas.microsoft.com/office/drawing/2014/main" id="{3BA2FF0E-E532-44AE-67C1-10CE60FFF962}"/>
               </a:ext>
             </a:extLst>
           </p:cNvPr>
@@ -2286,7 +2286,7 @@
           <p:cNvPr id="4" name="Text Placeholder 3">
             <a:extLst>
               <a:ext uri="{FF2B5EF4-FFF2-40B4-BE49-F238E27FC236}">
-                <a16:creationId xmlns:a16="http://schemas.microsoft.com/office/drawing/2014/main" id="{8967465F-3847-25A0-96C8-14B78C9AAE57}"/>
+                <a16:creationId xmlns:a16="http://schemas.microsoft.com/office/drawing/2014/main" id="{0D91EDCA-D304-5A9D-5327-BEEF8252112A}"/>
               </a:ext>
             </a:extLst>
           </p:cNvPr>
@@ -2357,7 +2357,7 @@
           <p:cNvPr id="5" name="Date Placeholder 4">
             <a:extLst>
               <a:ext uri="{FF2B5EF4-FFF2-40B4-BE49-F238E27FC236}">
-                <a16:creationId xmlns:a16="http://schemas.microsoft.com/office/drawing/2014/main" id="{544D838F-4171-DFB3-A300-5697E4A9375B}"/>
+                <a16:creationId xmlns:a16="http://schemas.microsoft.com/office/drawing/2014/main" id="{4B255586-BCC6-EB88-52B2-D0BEDC4B9D23}"/>
               </a:ext>
             </a:extLst>
           </p:cNvPr>
@@ -2373,7 +2373,7 @@
           <a:bodyPr/>
           <a:lstStyle/>
           <a:p>
-            <a:fld id="{71518110-4A3B-49AD-AD07-07F38F7CBB60}" type="datetimeFigureOut">
+            <a:fld id="{56A078A5-2014-4063-8460-52BAF75C1526}" type="datetimeFigureOut">
               <a:rPr lang="en-US" smtClean="0"/>
               <a:t>6/26/2026</a:t>
             </a:fld>
@@ -2386,7 +2386,7 @@
           <p:cNvPr id="6" name="Footer Placeholder 5">
             <a:extLst>
               <a:ext uri="{FF2B5EF4-FFF2-40B4-BE49-F238E27FC236}">
-                <a16:creationId xmlns:a16="http://schemas.microsoft.com/office/drawing/2014/main" id="{7190C775-ADDB-F91A-D166-9292866FBB79}"/>
+                <a16:creationId xmlns:a16="http://schemas.microsoft.com/office/drawing/2014/main" id="{15FAAA34-FE94-7430-A8B4-90FB427967CC}"/>
               </a:ext>
             </a:extLst>
           </p:cNvPr>
@@ -2411,7 +2411,7 @@
           <p:cNvPr id="7" name="Slide Number Placeholder 6">
             <a:extLst>
               <a:ext uri="{FF2B5EF4-FFF2-40B4-BE49-F238E27FC236}">
-                <a16:creationId xmlns:a16="http://schemas.microsoft.com/office/drawing/2014/main" id="{E3D434DB-5AF1-6515-6EF6-43621C24A4C3}"/>
+                <a16:creationId xmlns:a16="http://schemas.microsoft.com/office/drawing/2014/main" id="{93D50457-2833-3DCE-C92C-44D7D39EFEFB}"/>
               </a:ext>
             </a:extLst>
           </p:cNvPr>
@@ -2427,7 +2427,7 @@
           <a:bodyPr/>
           <a:lstStyle/>
           <a:p>
-            <a:fld id="{5A4D5E66-681C-463C-9044-6FD700F64034}" type="slidenum">
+            <a:fld id="{856F0DEB-0330-4E70-98E9-AA8247FA1445}" type="slidenum">
               <a:rPr lang="en-US" smtClean="0"/>
               <a:t>‹#›</a:t>
             </a:fld>
@@ -2438,7 +2438,7 @@
     </p:spTree>
     <p:extLst>
       <p:ext uri="{BB962C8B-B14F-4D97-AF65-F5344CB8AC3E}">
-        <p14:creationId xmlns:p14="http://schemas.microsoft.com/office/powerpoint/2010/main" val="1828390227"/>
+        <p14:creationId xmlns:p14="http://schemas.microsoft.com/office/powerpoint/2010/main" val="1508678214"/>
       </p:ext>
     </p:extLst>
   </p:cSld>
@@ -2470,7 +2470,7 @@
           <p:cNvPr id="2" name="Title 1">
             <a:extLst>
               <a:ext uri="{FF2B5EF4-FFF2-40B4-BE49-F238E27FC236}">
-                <a16:creationId xmlns:a16="http://schemas.microsoft.com/office/drawing/2014/main" id="{6505BBBE-5730-757C-3398-810E496EA05B}"/>
+                <a16:creationId xmlns:a16="http://schemas.microsoft.com/office/drawing/2014/main" id="{A366B4C2-ECC7-60FE-893C-7E6EC4B7F7FE}"/>
               </a:ext>
             </a:extLst>
           </p:cNvPr>
@@ -2507,7 +2507,7 @@
           <p:cNvPr id="3" name="Picture Placeholder 2">
             <a:extLst>
               <a:ext uri="{FF2B5EF4-FFF2-40B4-BE49-F238E27FC236}">
-                <a16:creationId xmlns:a16="http://schemas.microsoft.com/office/drawing/2014/main" id="{E8A4A491-F96D-CA5D-5D58-2ECD666653D7}"/>
+                <a16:creationId xmlns:a16="http://schemas.microsoft.com/office/drawing/2014/main" id="{DCD663F3-C13F-1C2F-1B42-EBF3E0232703}"/>
               </a:ext>
             </a:extLst>
           </p:cNvPr>
@@ -2574,7 +2574,7 @@
           <p:cNvPr id="4" name="Text Placeholder 3">
             <a:extLst>
               <a:ext uri="{FF2B5EF4-FFF2-40B4-BE49-F238E27FC236}">
-                <a16:creationId xmlns:a16="http://schemas.microsoft.com/office/drawing/2014/main" id="{62DEF3F6-CD5F-8AFB-2638-BF5B128A33F9}"/>
+                <a16:creationId xmlns:a16="http://schemas.microsoft.com/office/drawing/2014/main" id="{705E7630-A536-D1F1-1501-2FBFE9579388}"/>
               </a:ext>
             </a:extLst>
           </p:cNvPr>
@@ -2645,7 +2645,7 @@
           <p:cNvPr id="5" name="Date Placeholder 4">
             <a:extLst>
               <a:ext uri="{FF2B5EF4-FFF2-40B4-BE49-F238E27FC236}">
-                <a16:creationId xmlns:a16="http://schemas.microsoft.com/office/drawing/2014/main" id="{66A5A04E-5BDD-EDF3-9BEE-B0027226FD65}"/>
+                <a16:creationId xmlns:a16="http://schemas.microsoft.com/office/drawing/2014/main" id="{AAD73F47-A286-E857-BEF9-C73B9BBF5DA4}"/>
               </a:ext>
             </a:extLst>
           </p:cNvPr>
@@ -2661,7 +2661,7 @@
           <a:bodyPr/>
           <a:lstStyle/>
           <a:p>
-            <a:fld id="{71518110-4A3B-49AD-AD07-07F38F7CBB60}" type="datetimeFigureOut">
+            <a:fld id="{56A078A5-2014-4063-8460-52BAF75C1526}" type="datetimeFigureOut">
               <a:rPr lang="en-US" smtClean="0"/>
               <a:t>6/26/2026</a:t>
             </a:fld>
@@ -2674,7 +2674,7 @@
           <p:cNvPr id="6" name="Footer Placeholder 5">
             <a:extLst>
               <a:ext uri="{FF2B5EF4-FFF2-40B4-BE49-F238E27FC236}">
-                <a16:creationId xmlns:a16="http://schemas.microsoft.com/office/drawing/2014/main" id="{81B1357A-2D97-05C6-526D-D721A5282717}"/>
+                <a16:creationId xmlns:a16="http://schemas.microsoft.com/office/drawing/2014/main" id="{C227BA47-8188-2FDA-AE9E-0F2DF658146C}"/>
               </a:ext>
             </a:extLst>
           </p:cNvPr>
@@ -2699,7 +2699,7 @@
           <p:cNvPr id="7" name="Slide Number Placeholder 6">
             <a:extLst>
               <a:ext uri="{FF2B5EF4-FFF2-40B4-BE49-F238E27FC236}">
-                <a16:creationId xmlns:a16="http://schemas.microsoft.com/office/drawing/2014/main" id="{B0011F62-C658-9E21-63EE-DFEC0635758E}"/>
+                <a16:creationId xmlns:a16="http://schemas.microsoft.com/office/drawing/2014/main" id="{C376FDF5-FDAA-24B9-798F-0C35375A7CA8}"/>
               </a:ext>
             </a:extLst>
           </p:cNvPr>
@@ -2715,7 +2715,7 @@
           <a:bodyPr/>
           <a:lstStyle/>
           <a:p>
-            <a:fld id="{5A4D5E66-681C-463C-9044-6FD700F64034}" type="slidenum">
+            <a:fld id="{856F0DEB-0330-4E70-98E9-AA8247FA1445}" type="slidenum">
               <a:rPr lang="en-US" smtClean="0"/>
               <a:t>‹#›</a:t>
             </a:fld>
@@ -2726,7 +2726,7 @@
     </p:spTree>
     <p:extLst>
       <p:ext uri="{BB962C8B-B14F-4D97-AF65-F5344CB8AC3E}">
-        <p14:creationId xmlns:p14="http://schemas.microsoft.com/office/powerpoint/2010/main" val="1975341121"/>
+        <p14:creationId xmlns:p14="http://schemas.microsoft.com/office/powerpoint/2010/main" val="2830133106"/>
       </p:ext>
     </p:extLst>
   </p:cSld>
@@ -2763,7 +2763,7 @@
           <p:cNvPr id="2" name="Title Placeholder 1">
             <a:extLst>
               <a:ext uri="{FF2B5EF4-FFF2-40B4-BE49-F238E27FC236}">
-                <a16:creationId xmlns:a16="http://schemas.microsoft.com/office/drawing/2014/main" id="{8E20AAC7-C84F-733F-74BD-7593DFA2ABEB}"/>
+                <a16:creationId xmlns:a16="http://schemas.microsoft.com/office/drawing/2014/main" id="{3B308178-92A5-BABE-85EC-C22822BACA11}"/>
               </a:ext>
             </a:extLst>
           </p:cNvPr>
@@ -2801,7 +2801,7 @@
           <p:cNvPr id="3" name="Text Placeholder 2">
             <a:extLst>
               <a:ext uri="{FF2B5EF4-FFF2-40B4-BE49-F238E27FC236}">
-                <a16:creationId xmlns:a16="http://schemas.microsoft.com/office/drawing/2014/main" id="{33E307B0-8317-B27E-C48E-41CCF824EEF3}"/>
+                <a16:creationId xmlns:a16="http://schemas.microsoft.com/office/drawing/2014/main" id="{D390DCEE-F041-E55C-8CC8-ECD62A8E8381}"/>
               </a:ext>
             </a:extLst>
           </p:cNvPr>
@@ -2868,7 +2868,7 @@
           <p:cNvPr id="4" name="Date Placeholder 3">
             <a:extLst>
               <a:ext uri="{FF2B5EF4-FFF2-40B4-BE49-F238E27FC236}">
-                <a16:creationId xmlns:a16="http://schemas.microsoft.com/office/drawing/2014/main" id="{48449F10-3B06-1C83-D4A3-7B5B7649255B}"/>
+                <a16:creationId xmlns:a16="http://schemas.microsoft.com/office/drawing/2014/main" id="{2E7BD726-272A-B080-1220-EB026F14B1A3}"/>
               </a:ext>
             </a:extLst>
           </p:cNvPr>
@@ -2902,7 +2902,7 @@
             </a:lvl1pPr>
           </a:lstStyle>
           <a:p>
-            <a:fld id="{71518110-4A3B-49AD-AD07-07F38F7CBB60}" type="datetimeFigureOut">
+            <a:fld id="{56A078A5-2014-4063-8460-52BAF75C1526}" type="datetimeFigureOut">
               <a:rPr lang="en-US" smtClean="0"/>
               <a:t>6/26/2026</a:t>
             </a:fld>
@@ -2915,7 +2915,7 @@
           <p:cNvPr id="5" name="Footer Placeholder 4">
             <a:extLst>
               <a:ext uri="{FF2B5EF4-FFF2-40B4-BE49-F238E27FC236}">
-                <a16:creationId xmlns:a16="http://schemas.microsoft.com/office/drawing/2014/main" id="{B9F657BF-1DF7-4EF6-A7B1-57E4A1EBAFA5}"/>
+                <a16:creationId xmlns:a16="http://schemas.microsoft.com/office/drawing/2014/main" id="{687B3B11-F0A9-2F58-B78F-059E0458811B}"/>
               </a:ext>
             </a:extLst>
           </p:cNvPr>
@@ -2958,7 +2958,7 @@
           <p:cNvPr id="6" name="Slide Number Placeholder 5">
             <a:extLst>
               <a:ext uri="{FF2B5EF4-FFF2-40B4-BE49-F238E27FC236}">
-                <a16:creationId xmlns:a16="http://schemas.microsoft.com/office/drawing/2014/main" id="{B8869D3B-7328-2D92-F3AF-3FB2D30A87DB}"/>
+                <a16:creationId xmlns:a16="http://schemas.microsoft.com/office/drawing/2014/main" id="{6C4ED291-BE14-DDC2-E774-2AA42419B51D}"/>
               </a:ext>
             </a:extLst>
           </p:cNvPr>
@@ -2992,7 +2992,7 @@
             </a:lvl1pPr>
           </a:lstStyle>
           <a:p>
-            <a:fld id="{5A4D5E66-681C-463C-9044-6FD700F64034}" type="slidenum">
+            <a:fld id="{856F0DEB-0330-4E70-98E9-AA8247FA1445}" type="slidenum">
               <a:rPr lang="en-US" smtClean="0"/>
               <a:t>‹#›</a:t>
             </a:fld>
@@ -3003,7 +3003,7 @@
     </p:spTree>
     <p:extLst>
       <p:ext uri="{BB962C8B-B14F-4D97-AF65-F5344CB8AC3E}">
-        <p14:creationId xmlns:p14="http://schemas.microsoft.com/office/powerpoint/2010/main" val="2586900411"/>
+        <p14:creationId xmlns:p14="http://schemas.microsoft.com/office/powerpoint/2010/main" val="298132067"/>
       </p:ext>
     </p:extLst>
   </p:cSld>
@@ -3326,7 +3326,7 @@
           <p:cNvPr id="2" name="Triangle">
             <a:extLst>
               <a:ext uri="{FF2B5EF4-FFF2-40B4-BE49-F238E27FC236}">
-                <a16:creationId xmlns:a16="http://schemas.microsoft.com/office/drawing/2014/main" id="{D2AAC5DB-D81A-696C-C0E0-91E22BB4992E}"/>
+                <a16:creationId xmlns:a16="http://schemas.microsoft.com/office/drawing/2014/main" id="{8CBE06CB-3B3D-D3FC-EE6D-7F804BDF4995}"/>
               </a:ext>
             </a:extLst>
           </p:cNvPr>
@@ -3395,7 +3395,7 @@
           <p:cNvPr id="3" name="CurvedLine">
             <a:extLst>
               <a:ext uri="{FF2B5EF4-FFF2-40B4-BE49-F238E27FC236}">
-                <a16:creationId xmlns:a16="http://schemas.microsoft.com/office/drawing/2014/main" id="{6B2A8C14-510D-5970-4491-05E70F4BC352}"/>
+                <a16:creationId xmlns:a16="http://schemas.microsoft.com/office/drawing/2014/main" id="{22CEFA65-935E-1D64-3973-188B04DB41F2}"/>
               </a:ext>
             </a:extLst>
           </p:cNvPr>
@@ -3470,7 +3470,7 @@
           <p:cNvPr id="4" name="Diamond">
             <a:extLst>
               <a:ext uri="{FF2B5EF4-FFF2-40B4-BE49-F238E27FC236}">
-                <a16:creationId xmlns:a16="http://schemas.microsoft.com/office/drawing/2014/main" id="{E944BD19-C383-77D7-4931-A8946E62B737}"/>
+                <a16:creationId xmlns:a16="http://schemas.microsoft.com/office/drawing/2014/main" id="{BA82E839-9059-D972-DB65-A148B42B9681}"/>
               </a:ext>
             </a:extLst>
           </p:cNvPr>
@@ -3538,7 +3538,7 @@
           <p:cNvPr id="5" name="TextBox 4">
             <a:extLst>
               <a:ext uri="{FF2B5EF4-FFF2-40B4-BE49-F238E27FC236}">
-                <a16:creationId xmlns:a16="http://schemas.microsoft.com/office/drawing/2014/main" id="{D8140637-0455-B81B-0249-B4B3B08C6DA2}"/>
+                <a16:creationId xmlns:a16="http://schemas.microsoft.com/office/drawing/2014/main" id="{90F65FD2-1561-7481-6157-E16A6FD215C6}"/>
               </a:ext>
             </a:extLst>
           </p:cNvPr>
@@ -3571,7 +3571,7 @@
     </p:spTree>
     <p:extLst>
       <p:ext uri="{BB962C8B-B14F-4D97-AF65-F5344CB8AC3E}">
-        <p14:creationId xmlns:p14="http://schemas.microsoft.com/office/powerpoint/2010/main" val="1329683131"/>
+        <p14:creationId xmlns:p14="http://schemas.microsoft.com/office/powerpoint/2010/main" val="336537760"/>
       </p:ext>
     </p:extLst>
   </p:cSld>
